--- a/gxls-power-platform-slides.pptx
+++ b/gxls-power-platform-slides.pptx
@@ -46,6 +46,7 @@
     <p:sldId id="467" r:id="rId37"/>
     <p:sldId id="468" r:id="rId38"/>
     <p:sldId id="469" r:id="rId39"/>
+    <p:sldId id="471" r:id="rId53"/>
     <p:sldId id="470" r:id="rId40"/>
   </p:sldIdLst>
   <p:sldSz cx="18288000" cy="10287000"/>
@@ -597,8 +598,7 @@
               <a:buAutoNum type="arabicPeriod"/>
             </a:pPr>
             <a:r>
-              <a:rPr lang="en-US" dirty="0"/>
-              <a:t>False!</a:t>
+              <a:t>We're going to start with something simple — building our first flow using a Power Automate template. Templates are pre-built flows you can customize. We'll set up a clock in, clock out workflow that reads from an Excel table. Open the first-flow workbook and let's walk through this together.</a:t>
             </a:r>
           </a:p>
           <a:p>
@@ -607,7 +607,7 @@
             </a:pPr>
             <a:r>
               <a:rPr lang="en-US" dirty="0"/>
-              <a:t>Function, Formula, Function</a:t>
+              <a:t/>
             </a:r>
           </a:p>
           <a:p>
@@ -616,7 +616,7 @@
             </a:pPr>
             <a:r>
               <a:rPr lang="en-US" dirty="0"/>
-              <a:t>Argument</a:t>
+              <a:t/>
             </a:r>
           </a:p>
         </p:txBody>
@@ -723,8 +723,7 @@
               <a:buAutoNum type="arabicPeriod"/>
             </a:pPr>
             <a:r>
-              <a:rPr lang="en-US" dirty="0"/>
-              <a:t>False!</a:t>
+              <a:t>Approval workflows are one of the most popular uses for Power Automate in organizations. We're going to build one that connects Microsoft Forms to Excel and Power Automate. When someone submits an expense, the flow sends an approval request. The response gets logged back into the workbook. This is a complete end-to-end process.</a:t>
             </a:r>
           </a:p>
           <a:p>
@@ -733,7 +732,7 @@
             </a:pPr>
             <a:r>
               <a:rPr lang="en-US" dirty="0"/>
-              <a:t>Function, Formula, Function</a:t>
+              <a:t/>
             </a:r>
           </a:p>
           <a:p>
@@ -742,7 +741,7 @@
             </a:pPr>
             <a:r>
               <a:rPr lang="en-US" dirty="0"/>
-              <a:t>Argument</a:t>
+              <a:t/>
             </a:r>
           </a:p>
         </p:txBody>
@@ -855,8 +854,7 @@
               <a:buAutoNum type="arabicPeriod"/>
             </a:pPr>
             <a:r>
-              <a:rPr lang="en-US" dirty="0"/>
-              <a:t>False!</a:t>
+              <a:t>Power Automate can also pull data from outside sources. We'll use an RSS feed from the BBC as an example — the flow checks for new articles and logs them into an Excel workbook. This is a good comparison point with Power Query: Power Query is great for scheduled data pulls, but Power Automate can react in real time and do things like send notifications when new data arrives.</a:t>
             </a:r>
           </a:p>
           <a:p>
@@ -865,7 +863,7 @@
             </a:pPr>
             <a:r>
               <a:rPr lang="en-US" dirty="0"/>
-              <a:t>Function, Formula, Function</a:t>
+              <a:t/>
             </a:r>
           </a:p>
           <a:p>
@@ -874,7 +872,7 @@
             </a:pPr>
             <a:r>
               <a:rPr lang="en-US" dirty="0"/>
-              <a:t>Argument</a:t>
+              <a:t/>
             </a:r>
           </a:p>
         </p:txBody>
@@ -987,8 +985,7 @@
               <a:buAutoNum type="arabicPeriod"/>
             </a:pPr>
             <a:r>
-              <a:rPr lang="en-US" dirty="0"/>
-              <a:t>False!</a:t>
+              <a:t>Last exercise for the Power Automate section. You're going to build a customer feedback review process. Start with a Forms trigger, add conditional logic based on the experience score, and send different emails depending on whether the feedback is positive or negative. Feel free to use Copilot to help you build this one — that's what it's there for.</a:t>
             </a:r>
           </a:p>
           <a:p>
@@ -997,7 +994,7 @@
             </a:pPr>
             <a:r>
               <a:rPr lang="en-US" dirty="0"/>
-              <a:t>Function, Formula, Function</a:t>
+              <a:t/>
             </a:r>
           </a:p>
           <a:p>
@@ -1006,7 +1003,7 @@
             </a:pPr>
             <a:r>
               <a:rPr lang="en-US" dirty="0"/>
-              <a:t>Argument</a:t>
+              <a:t/>
             </a:r>
           </a:p>
         </p:txBody>
@@ -1101,8 +1098,7 @@
               <a:buAutoNum type="arabicPeriod"/>
             </a:pPr>
             <a:r>
-              <a:rPr lang="en-US" dirty="0"/>
-              <a:t>False!</a:t>
+              <a:t>Alright, switching gears to Power BI. If you've used Power Query in Excel, this is going to feel familiar. We'll load a worksheet into Power BI Desktop, profile the data to check for quality issues, and do some basic transformations. The Power Query experience in Power BI is almost identical to Excel — same interface, same M language under the hood.</a:t>
             </a:r>
           </a:p>
           <a:p>
@@ -1111,7 +1107,7 @@
             </a:pPr>
             <a:r>
               <a:rPr lang="en-US" dirty="0"/>
-              <a:t>Function, Formula, Function</a:t>
+              <a:t/>
             </a:r>
           </a:p>
           <a:p>
@@ -1120,7 +1116,7 @@
             </a:pPr>
             <a:r>
               <a:rPr lang="en-US" dirty="0"/>
-              <a:t>Argument</a:t>
+              <a:t/>
             </a:r>
           </a:p>
         </p:txBody>
@@ -1227,8 +1223,7 @@
               <a:buAutoNum type="arabicPeriod"/>
             </a:pPr>
             <a:r>
-              <a:rPr lang="en-US" dirty="0"/>
-              <a:t>False!</a:t>
+              <a:t>If you've already built a data model in Excel with Power Pivot, you don't have to start from scratch in Power BI. We can import your existing data model directly. I'll show you how, and we'll talk about the strengths and limitations of this approach — it works well for getting started quickly, but there are some things that don't carry over perfectly.</a:t>
             </a:r>
           </a:p>
           <a:p>
@@ -1237,7 +1232,7 @@
             </a:pPr>
             <a:r>
               <a:rPr lang="en-US" dirty="0"/>
-              <a:t>Function, Formula, Function</a:t>
+              <a:t/>
             </a:r>
           </a:p>
           <a:p>
@@ -1246,7 +1241,7 @@
             </a:pPr>
             <a:r>
               <a:rPr lang="en-US" dirty="0"/>
-              <a:t>Argument</a:t>
+              <a:t/>
             </a:r>
           </a:p>
         </p:txBody>
@@ -1341,8 +1336,7 @@
               <a:buAutoNum type="arabicPeriod"/>
             </a:pPr>
             <a:r>
-              <a:rPr lang="en-US" dirty="0"/>
-              <a:t>False!</a:t>
+              <a:t>Now for the fun part — building interactive visuals. We'll use the penguins dataset to create charts, add slicers and timelines, and see how cross-filtering works — where clicking on one chart filters all the others automatically. This is where Power BI really shines compared to Excel — the interactivity is built in.</a:t>
             </a:r>
           </a:p>
           <a:p>
@@ -1351,7 +1345,7 @@
             </a:pPr>
             <a:r>
               <a:rPr lang="en-US" dirty="0"/>
-              <a:t>Function, Formula, Function</a:t>
+              <a:t/>
             </a:r>
           </a:p>
           <a:p>
@@ -1360,7 +1354,7 @@
             </a:pPr>
             <a:r>
               <a:rPr lang="en-US" dirty="0"/>
-              <a:t>Argument</a:t>
+              <a:t/>
             </a:r>
           </a:p>
         </p:txBody>
@@ -1467,8 +1461,7 @@
               <a:buAutoNum type="arabicPeriod"/>
             </a:pPr>
             <a:r>
-              <a:rPr lang="en-US" dirty="0"/>
-              <a:t>False!</a:t>
+              <a:t>Time for the Power BI exercise. You're working with baseball data here. For all records since 1970, create a stolen base percentage measure using DAX, compare that metric over time by league, look at the relationship between runs and wins, and add a timeline slicer. The solution file is in the folder if you need it.</a:t>
             </a:r>
           </a:p>
           <a:p>
@@ -1477,7 +1470,7 @@
             </a:pPr>
             <a:r>
               <a:rPr lang="en-US" dirty="0"/>
-              <a:t>Function, Formula, Function</a:t>
+              <a:t/>
             </a:r>
           </a:p>
           <a:p>
@@ -1486,7 +1479,7 @@
             </a:pPr>
             <a:r>
               <a:rPr lang="en-US" dirty="0"/>
-              <a:t>Argument</a:t>
+              <a:t/>
             </a:r>
           </a:p>
         </p:txBody>
@@ -1581,8 +1574,7 @@
               <a:buAutoNum type="arabicPeriod"/>
             </a:pPr>
             <a:r>
-              <a:rPr lang="en-US" dirty="0"/>
-              <a:t>False!</a:t>
+              <a:t>Power Apps lets you turn an Excel table into a working mobile app in minutes. We'll upload our Excel data, and Power Apps will automatically generate a three-screen app — a browse screen, a detail screen, and an edit screen. You can add records, edit them, and preview everything right in the browser.</a:t>
             </a:r>
           </a:p>
           <a:p>
@@ -1591,7 +1583,7 @@
             </a:pPr>
             <a:r>
               <a:rPr lang="en-US" dirty="0"/>
-              <a:t>Function, Formula, Function</a:t>
+              <a:t/>
             </a:r>
           </a:p>
           <a:p>
@@ -1600,7 +1592,7 @@
             </a:pPr>
             <a:r>
               <a:rPr lang="en-US" dirty="0"/>
-              <a:t>Argument</a:t>
+              <a:t/>
             </a:r>
           </a:p>
         </p:txBody>
@@ -1689,8 +1681,7 @@
               <a:buAutoNum type="arabicPeriod"/>
             </a:pPr>
             <a:r>
-              <a:rPr lang="en-US" dirty="0"/>
-              <a:t>False!</a:t>
+              <a:t>The auto-generated app is a good start, but you'll want to customize it. We'll add required fields so users can't submit incomplete data, create dropdown menus for data validation, and add date range validation to prevent impossible entries. These small touches make the difference between a prototype and something people actually use.</a:t>
             </a:r>
           </a:p>
           <a:p>
@@ -1699,7 +1690,7 @@
             </a:pPr>
             <a:r>
               <a:rPr lang="en-US" dirty="0"/>
-              <a:t>Function, Formula, Function</a:t>
+              <a:t/>
             </a:r>
           </a:p>
           <a:p>
@@ -1708,7 +1699,7 @@
             </a:pPr>
             <a:r>
               <a:rPr lang="en-US" dirty="0"/>
-              <a:t>Argument</a:t>
+              <a:t/>
             </a:r>
           </a:p>
         </p:txBody>
@@ -1815,8 +1806,7 @@
               <a:buAutoNum type="arabicPeriod"/>
             </a:pPr>
             <a:r>
-              <a:rPr lang="en-US" dirty="0"/>
-              <a:t>False!</a:t>
+              <a:t>Once your app works in development, you need to deploy it. We'll prepare the Excel workbook for external use — making sure it's stored in the right place — and then export the app as a ZIP file for migration. This is the process you'd follow to move an app from a test environment to production.</a:t>
             </a:r>
           </a:p>
           <a:p>
@@ -1825,7 +1815,7 @@
             </a:pPr>
             <a:r>
               <a:rPr lang="en-US" dirty="0"/>
-              <a:t>Function, Formula, Function</a:t>
+              <a:t/>
             </a:r>
           </a:p>
           <a:p>
@@ -1834,7 +1824,7 @@
             </a:pPr>
             <a:r>
               <a:rPr lang="en-US" dirty="0"/>
-              <a:t>Argument</a:t>
+              <a:t/>
             </a:r>
           </a:p>
         </p:txBody>
@@ -1929,8 +1919,7 @@
               <a:buAutoNum type="arabicPeriod"/>
             </a:pPr>
             <a:r>
-              <a:rPr lang="en-US" dirty="0"/>
-              <a:t>False!</a:t>
+              <a:t>Now that we have a working flow, let's make the output look better. Power Fx is the formula language behind Power Platform — think of it like Excel formulas but for flows and apps. We'll use it to format dates, combine text, and clean up the messages our flow sends. If you've written an IF or CONCATENATE in Excel, you already know the basics.</a:t>
             </a:r>
           </a:p>
           <a:p>
@@ -1939,7 +1928,7 @@
             </a:pPr>
             <a:r>
               <a:rPr lang="en-US" dirty="0"/>
-              <a:t>Function, Formula, Function</a:t>
+              <a:t/>
             </a:r>
           </a:p>
           <a:p>
@@ -1948,7 +1937,7 @@
             </a:pPr>
             <a:r>
               <a:rPr lang="en-US" dirty="0"/>
-              <a:t>Argument</a:t>
+              <a:t/>
             </a:r>
           </a:p>
         </p:txBody>
@@ -2055,8 +2044,7 @@
               <a:buAutoNum type="arabicPeriod"/>
             </a:pPr>
             <a:r>
-              <a:rPr lang="en-US" dirty="0"/>
-              <a:t>False!</a:t>
+              <a:t>For this challenge, you're going to build an app that includes images. The power-apps-challenge folder has an Excel file with image URLs and some photos. Your job is to create an app where users can see the photos alongside the data. This is common for things like maintenance tracking, inventory, or inspection apps.</a:t>
             </a:r>
           </a:p>
           <a:p>
@@ -2065,7 +2053,7 @@
             </a:pPr>
             <a:r>
               <a:rPr lang="en-US" dirty="0"/>
-              <a:t>Function, Formula, Function</a:t>
+              <a:t/>
             </a:r>
           </a:p>
           <a:p>
@@ -2074,7 +2062,7 @@
             </a:pPr>
             <a:r>
               <a:rPr lang="en-US" dirty="0"/>
-              <a:t>Argument</a:t>
+              <a:t/>
             </a:r>
           </a:p>
         </p:txBody>
@@ -2187,8 +2175,7 @@
               <a:buAutoNum type="arabicPeriod"/>
             </a:pPr>
             <a:r>
-              <a:rPr lang="en-US" dirty="0"/>
-              <a:t>False!</a:t>
+              <a:t>Our last tool is Copilot Studio, which lets you build custom AI chatbots. We'll create a chatbot that answers Excel questions using MVP websites as its knowledge base. You'll add trusted sources, set up the agent's instructions, and test it with some real questions. Open the mvp-knowledge-base-instructions document for the setup details.</a:t>
             </a:r>
           </a:p>
           <a:p>
@@ -2197,7 +2184,7 @@
             </a:pPr>
             <a:r>
               <a:rPr lang="en-US" dirty="0"/>
-              <a:t>Function, Formula, Function</a:t>
+              <a:t/>
             </a:r>
           </a:p>
           <a:p>
@@ -2206,7 +2193,7 @@
             </a:pPr>
             <a:r>
               <a:rPr lang="en-US" dirty="0"/>
-              <a:t>Argument</a:t>
+              <a:t/>
             </a:r>
           </a:p>
         </p:txBody>
@@ -2319,8 +2306,7 @@
               <a:buAutoNum type="arabicPeriod"/>
             </a:pPr>
             <a:r>
-              <a:rPr lang="en-US" dirty="0"/>
-              <a:t>False!</a:t>
+              <a:t>For the exercise, you'll build a chatbot that helps people find Excel keyboard shortcuts. The knowledge base is just a simple Excel workbook with shortcut data. You'll also customize the goodbye topic to give it some personality, and then publish it to Microsoft Teams so you can see it running inside a real app. The instructions are in the copilot-studio-exercise folder.</a:t>
             </a:r>
           </a:p>
           <a:p>
@@ -2329,7 +2315,7 @@
             </a:pPr>
             <a:r>
               <a:rPr lang="en-US" dirty="0"/>
-              <a:t>Function, Formula, Function</a:t>
+              <a:t/>
             </a:r>
           </a:p>
           <a:p>
@@ -2338,7 +2324,7 @@
             </a:pPr>
             <a:r>
               <a:rPr lang="en-US" dirty="0"/>
-              <a:t>Argument</a:t>
+              <a:t/>
             </a:r>
           </a:p>
         </p:txBody>
@@ -2378,6 +2364,216 @@
         <p14:creationId xmlns:p14="http://schemas.microsoft.com/office/powerpoint/2010/main" val="4184537247"/>
       </p:ext>
     </p:extLst>
+  </p:cSld>
+  <p:clrMapOvr>
+    <a:masterClrMapping/>
+  </p:clrMapOvr>
+</p:notes>
+</file>
+
+<file path=ppt/notesSlides/notesSlide23.xml><?xml version="1.0" encoding="utf-8"?>
+<p:notes xmlns:a="http://schemas.openxmlformats.org/drawingml/2006/main" xmlns:p="http://schemas.openxmlformats.org/presentationml/2006/main" xmlns:r="http://schemas.openxmlformats.org/officeDocument/2006/relationships">
+  <p:cSld>
+    <p:spTree>
+      <p:nvGrpSpPr>
+        <p:cNvPr id="1" name=""/>
+        <p:cNvGrpSpPr/>
+        <p:nvPr/>
+      </p:nvGrpSpPr>
+      <p:grpSpPr>
+        <a:xfrm>
+          <a:off x="0" y="0"/>
+          <a:ext cx="0" cy="0"/>
+          <a:chOff x="0" y="0"/>
+          <a:chExt cx="0" cy="0"/>
+        </a:xfrm>
+      </p:grpSpPr>
+      <p:sp>
+        <p:nvSpPr>
+          <p:cNvPr id="2" name="Slide Image Placeholder 1"/>
+          <p:cNvSpPr>
+            <a:spLocks noGrp="1"/>
+          </p:cNvSpPr>
+          <p:nvPr>
+            <p:ph type="sldImg" idx="2"/>
+          </p:nvPr>
+        </p:nvSpPr>
+        <p:spPr/>
+      </p:sp>
+      <p:sp>
+        <p:nvSpPr>
+          <p:cNvPr id="3" name="Notes Placeholder 2"/>
+          <p:cNvSpPr>
+            <a:spLocks noGrp="1"/>
+          </p:cNvSpPr>
+          <p:nvPr>
+            <p:ph type="body" idx="3" sz="quarter"/>
+          </p:nvPr>
+        </p:nvSpPr>
+        <p:spPr/>
+        <p:txBody>
+          <a:bodyPr/>
+          <a:lstStyle/>
+          <a:p>
+            <a:r>
+              <a:t>Let's step back and look at the big picture. Today you've used four different Power Platform tools, all connected to Excel data. The key takeaway is you don't need to learn everything at once. Pick the tool that solves your biggest headache right now — maybe that's automating a repetitive task with Power Automate, or replacing a static report with a live Power BI dashboard. Start there, get comfortable, and then branch out. And remember, governance matters — share your flows and apps responsibly, use proper naming conventions, and document what you build so your team can maintain it. You're all well on your way to being Power Platform champions. Thanks for a great session.</a:t>
+            </a:r>
+          </a:p>
+        </p:txBody>
+      </p:sp>
+      <p:sp>
+        <p:nvSpPr>
+          <p:cNvPr id="4" name="Slide Number Placeholder 3"/>
+          <p:cNvSpPr>
+            <a:spLocks noGrp="1"/>
+          </p:cNvSpPr>
+          <p:nvPr>
+            <p:ph type="sldNum" idx="5" sz="quarter"/>
+          </p:nvPr>
+        </p:nvSpPr>
+        <p:spPr/>
+      </p:sp>
+    </p:spTree>
+  </p:cSld>
+  <p:clrMapOvr>
+    <a:masterClrMapping/>
+  </p:clrMapOvr>
+</p:notes>
+</file>
+
+<file path=ppt/notesSlides/notesSlide24.xml><?xml version="1.0" encoding="utf-8"?>
+<p:notes xmlns:a="http://schemas.openxmlformats.org/drawingml/2006/main" xmlns:p="http://schemas.openxmlformats.org/presentationml/2006/main" xmlns:r="http://schemas.openxmlformats.org/officeDocument/2006/relationships">
+  <p:cSld>
+    <p:spTree>
+      <p:nvGrpSpPr>
+        <p:cNvPr id="1" name=""/>
+        <p:cNvGrpSpPr/>
+        <p:nvPr/>
+      </p:nvGrpSpPr>
+      <p:grpSpPr>
+        <a:xfrm>
+          <a:off x="0" y="0"/>
+          <a:ext cx="0" cy="0"/>
+          <a:chOff x="0" y="0"/>
+          <a:chExt cx="0" cy="0"/>
+        </a:xfrm>
+      </p:grpSpPr>
+      <p:sp>
+        <p:nvSpPr>
+          <p:cNvPr id="2" name="Slide Image Placeholder 1"/>
+          <p:cNvSpPr>
+            <a:spLocks noGrp="1"/>
+          </p:cNvSpPr>
+          <p:nvPr>
+            <p:ph type="sldImg" idx="2"/>
+          </p:nvPr>
+        </p:nvSpPr>
+        <p:spPr/>
+      </p:sp>
+      <p:sp>
+        <p:nvSpPr>
+          <p:cNvPr id="3" name="Notes Placeholder 2"/>
+          <p:cNvSpPr>
+            <a:spLocks noGrp="1"/>
+          </p:cNvSpPr>
+          <p:nvPr>
+            <p:ph type="body" idx="3" sz="quarter"/>
+          </p:nvPr>
+        </p:nvSpPr>
+        <p:spPr/>
+        <p:txBody>
+          <a:bodyPr/>
+          <a:lstStyle/>
+          <a:p>
+            <a:r>
+              <a:t>So here's what we're going to cover today. The goal is to show you how your existing Excel skills connect directly to four tools in the Power Platform. We'll build real workflows, real dashboards, a real app, and even a chatbot — all starting from Excel data. By the end, you should feel confident picking up any of these tools on your own and applying them at work.</a:t>
+            </a:r>
+          </a:p>
+        </p:txBody>
+      </p:sp>
+      <p:sp>
+        <p:nvSpPr>
+          <p:cNvPr id="4" name="Slide Number Placeholder 3"/>
+          <p:cNvSpPr>
+            <a:spLocks noGrp="1"/>
+          </p:cNvSpPr>
+          <p:nvPr>
+            <p:ph type="sldNum" idx="5" sz="quarter"/>
+          </p:nvPr>
+        </p:nvSpPr>
+        <p:spPr/>
+      </p:sp>
+    </p:spTree>
+  </p:cSld>
+  <p:clrMapOvr>
+    <a:masterClrMapping/>
+  </p:clrMapOvr>
+</p:notes>
+</file>
+
+<file path=ppt/notesSlides/notesSlide25.xml><?xml version="1.0" encoding="utf-8"?>
+<p:notes xmlns:a="http://schemas.openxmlformats.org/drawingml/2006/main" xmlns:p="http://schemas.openxmlformats.org/presentationml/2006/main" xmlns:r="http://schemas.openxmlformats.org/officeDocument/2006/relationships">
+  <p:cSld>
+    <p:spTree>
+      <p:nvGrpSpPr>
+        <p:cNvPr id="1" name=""/>
+        <p:cNvGrpSpPr/>
+        <p:nvPr/>
+      </p:nvGrpSpPr>
+      <p:grpSpPr>
+        <a:xfrm>
+          <a:off x="0" y="0"/>
+          <a:ext cx="0" cy="0"/>
+          <a:chOff x="0" y="0"/>
+          <a:chExt cx="0" cy="0"/>
+        </a:xfrm>
+      </p:grpSpPr>
+      <p:sp>
+        <p:nvSpPr>
+          <p:cNvPr id="2" name="Slide Image Placeholder 1"/>
+          <p:cNvSpPr>
+            <a:spLocks noGrp="1"/>
+          </p:cNvSpPr>
+          <p:nvPr>
+            <p:ph type="sldImg" idx="2"/>
+          </p:nvPr>
+        </p:nvSpPr>
+        <p:spPr/>
+      </p:sp>
+      <p:sp>
+        <p:nvSpPr>
+          <p:cNvPr id="3" name="Notes Placeholder 2"/>
+          <p:cNvSpPr>
+            <a:spLocks noGrp="1"/>
+          </p:cNvSpPr>
+          <p:nvPr>
+            <p:ph type="body" idx="3" sz="quarter"/>
+          </p:nvPr>
+        </p:nvSpPr>
+        <p:spPr/>
+        <p:txBody>
+          <a:bodyPr/>
+          <a:lstStyle/>
+          <a:p>
+            <a:r>
+              <a:t>Before we get started, go ahead and download the course files from this link if you haven't already. It's a ZIP file from GitHub. Unzip it and upload the folder to your OneDrive or SharePoint — we'll be connecting to those files throughout the day.</a:t>
+            </a:r>
+          </a:p>
+        </p:txBody>
+      </p:sp>
+      <p:sp>
+        <p:nvSpPr>
+          <p:cNvPr id="4" name="Slide Number Placeholder 3"/>
+          <p:cNvSpPr>
+            <a:spLocks noGrp="1"/>
+          </p:cNvSpPr>
+          <p:nvPr>
+            <p:ph type="sldNum" idx="5" sz="quarter"/>
+          </p:nvPr>
+        </p:nvSpPr>
+        <p:spPr/>
+      </p:sp>
+    </p:spTree>
   </p:cSld>
   <p:clrMapOvr>
     <a:masterClrMapping/>
@@ -2451,8 +2647,7 @@
               <a:buAutoNum type="arabicPeriod"/>
             </a:pPr>
             <a:r>
-              <a:rPr lang="en-US" dirty="0"/>
-              <a:t>False!</a:t>
+              <a:t>Here's where things get interesting. We're going to use Copilot inside Power Automate to build a flow using plain English. You describe what you want, and Copilot generates the flow for you. We'll create a monthly flow that pulls data from a workbook and posts a summary to Teams. It won't be perfect on the first try, but it gets you eighty percent of the way there — and then you fine-tune.</a:t>
             </a:r>
           </a:p>
           <a:p>
@@ -2461,7 +2656,7 @@
             </a:pPr>
             <a:r>
               <a:rPr lang="en-US" dirty="0"/>
-              <a:t>Function, Formula, Function</a:t>
+              <a:t/>
             </a:r>
           </a:p>
           <a:p>
@@ -2470,7 +2665,7 @@
             </a:pPr>
             <a:r>
               <a:rPr lang="en-US" dirty="0"/>
-              <a:t>Argument</a:t>
+              <a:t/>
             </a:r>
           </a:p>
         </p:txBody>
@@ -2583,8 +2778,7 @@
               <a:buAutoNum type="arabicPeriod"/>
             </a:pPr>
             <a:r>
-              <a:rPr lang="en-US" dirty="0"/>
-              <a:t>False!</a:t>
+              <a:t>Alright, time for you to try it. Take the clock in, clock out flow we just built and extend it. You're going to add a comment prompt so users can add notes when they clock in or out. Save that data back to the worksheet, and post an update to Teams with all the details. Take about ten minutes on this. I'll be walking around if you get stuck.</a:t>
             </a:r>
           </a:p>
           <a:p>
@@ -2593,7 +2787,7 @@
             </a:pPr>
             <a:r>
               <a:rPr lang="en-US" dirty="0"/>
-              <a:t>Function, Formula, Function</a:t>
+              <a:t/>
             </a:r>
           </a:p>
           <a:p>
@@ -2602,7 +2796,7 @@
             </a:pPr>
             <a:r>
               <a:rPr lang="en-US" dirty="0"/>
-              <a:t>Argument</a:t>
+              <a:t/>
             </a:r>
           </a:p>
         </p:txBody>
@@ -2715,8 +2909,7 @@
               <a:buAutoNum type="arabicPeriod"/>
             </a:pPr>
             <a:r>
-              <a:rPr lang="en-US" dirty="0"/>
-              <a:t>False!</a:t>
+              <a:t>Let's look at a really common use case — automatically logging incoming emails into an Excel workbook. We'll set up a flow that triggers whenever a new email arrives from a specific sender, extracts the key details, and adds a row to our tracking spreadsheet. This is the kind of thing that saves you twenty minutes a day if you're doing it manually.</a:t>
             </a:r>
           </a:p>
           <a:p>
@@ -2725,7 +2918,7 @@
             </a:pPr>
             <a:r>
               <a:rPr lang="en-US" dirty="0"/>
-              <a:t>Function, Formula, Function</a:t>
+              <a:t/>
             </a:r>
           </a:p>
           <a:p>
@@ -2734,7 +2927,7 @@
             </a:pPr>
             <a:r>
               <a:rPr lang="en-US" dirty="0"/>
-              <a:t>Argument</a:t>
+              <a:t/>
             </a:r>
           </a:p>
         </p:txBody>
@@ -2847,8 +3040,7 @@
               <a:buAutoNum type="arabicPeriod"/>
             </a:pPr>
             <a:r>
-              <a:rPr lang="en-US" dirty="0"/>
-              <a:t>False!</a:t>
+              <a:t>Not every email needs the same response, right? So now we're adding conditional logic. We'll create a flow that only sends notifications when a project status is delayed. We'll test it, then put it on a schedule so it runs automatically. This is where Power Automate starts feeling really powerful — you set it and forget it.</a:t>
             </a:r>
           </a:p>
           <a:p>
@@ -2857,7 +3049,7 @@
             </a:pPr>
             <a:r>
               <a:rPr lang="en-US" dirty="0"/>
-              <a:t>Function, Formula, Function</a:t>
+              <a:t/>
             </a:r>
           </a:p>
           <a:p>
@@ -2866,7 +3058,7 @@
             </a:pPr>
             <a:r>
               <a:rPr lang="en-US" dirty="0"/>
-              <a:t>Argument</a:t>
+              <a:t/>
             </a:r>
           </a:p>
         </p:txBody>
@@ -2979,8 +3171,7 @@
               <a:buAutoNum type="arabicPeriod"/>
             </a:pPr>
             <a:r>
-              <a:rPr lang="en-US" dirty="0"/>
-              <a:t>False!</a:t>
+              <a:t>Now we're combining two tools — Office Scripts and Power Automate. Office Scripts let you write small TypeScript programs that run inside Excel. We'll use one that automatically builds a table of contents for any workbook, and then schedule it with Power Automate so it runs on its own. Open the power-automate-office-scripts workbook and the add-toc text file.</a:t>
             </a:r>
           </a:p>
           <a:p>
@@ -2989,7 +3180,7 @@
             </a:pPr>
             <a:r>
               <a:rPr lang="en-US" dirty="0"/>
-              <a:t>Function, Formula, Function</a:t>
+              <a:t/>
             </a:r>
           </a:p>
           <a:p>
@@ -2998,7 +3189,7 @@
             </a:pPr>
             <a:r>
               <a:rPr lang="en-US" dirty="0"/>
-              <a:t>Argument</a:t>
+              <a:t/>
             </a:r>
           </a:p>
         </p:txBody>
@@ -3111,8 +3302,7 @@
               <a:buAutoNum type="arabicPeriod"/>
             </a:pPr>
             <a:r>
-              <a:rPr lang="en-US" dirty="0"/>
-              <a:t>False!</a:t>
+              <a:t>What if you need to run that same script on multiple workbooks? That's what we're tackling here. We'll loop through a folder of Excel files and apply our TOC script to each one. We'll also add a check to make sure we're only processing Excel files and skipping anything else in the folder. Open the multiple-workbooks folder.</a:t>
             </a:r>
           </a:p>
           <a:p>
@@ -3121,7 +3311,7 @@
             </a:pPr>
             <a:r>
               <a:rPr lang="en-US" dirty="0"/>
-              <a:t>Function, Formula, Function</a:t>
+              <a:t/>
             </a:r>
           </a:p>
           <a:p>
@@ -3130,7 +3320,7 @@
             </a:pPr>
             <a:r>
               <a:rPr lang="en-US" dirty="0"/>
-              <a:t>Argument</a:t>
+              <a:t/>
             </a:r>
           </a:p>
         </p:txBody>
@@ -3243,8 +3433,7 @@
               <a:buAutoNum type="arabicPeriod"/>
             </a:pPr>
             <a:r>
-              <a:rPr lang="en-US" dirty="0"/>
-              <a:t>False!</a:t>
+              <a:t>Here's your next exercise. In the pa-challenge folder, you'll find a file-log workbook and an incoming-files folder. Your job is to create a flow that logs every new workbook uploaded to that folder. Use the 'when a file is created' trigger, add conditional logic to check the file type, and consider using Power Fx to format the upload date. Take about ten minutes.</a:t>
             </a:r>
           </a:p>
           <a:p>
@@ -3253,7 +3442,7 @@
             </a:pPr>
             <a:r>
               <a:rPr lang="en-US" dirty="0"/>
-              <a:t>Function, Formula, Function</a:t>
+              <a:t/>
             </a:r>
           </a:p>
           <a:p>
@@ -3262,7 +3451,7 @@
             </a:pPr>
             <a:r>
               <a:rPr lang="en-US" dirty="0"/>
-              <a:t>Argument</a:t>
+              <a:t/>
             </a:r>
           </a:p>
         </p:txBody>
@@ -14071,34 +14260,165 @@
 </file>
 
 <file path=ppt/slides/slide39.xml><?xml version="1.0" encoding="utf-8"?>
-<p:sld xmlns:a="http://schemas.openxmlformats.org/drawingml/2006/main" xmlns:r="http://schemas.openxmlformats.org/officeDocument/2006/relationships" xmlns:p="http://schemas.openxmlformats.org/presentationml/2006/main">
+<p:sld xmlns:a="http://schemas.openxmlformats.org/drawingml/2006/main" xmlns:p="http://schemas.openxmlformats.org/presentationml/2006/main" xmlns:r="http://schemas.openxmlformats.org/officeDocument/2006/relationships">
   <p:cSld>
     <p:spTree>
       <p:nvGrpSpPr>
-        <p:cNvPr id="1" name="">
-          <a:extLst>
-            <a:ext uri="{FF2B5EF4-FFF2-40B4-BE49-F238E27FC236}">
-              <a16:creationId xmlns:a16="http://schemas.microsoft.com/office/drawing/2014/main" id="{2501CF9C-FC7D-DEAE-2D87-10577021DCAD}"/>
-            </a:ext>
-          </a:extLst>
-        </p:cNvPr>
+        <p:cNvPr id="1" name=""/>
         <p:cNvGrpSpPr/>
         <p:nvPr/>
       </p:nvGrpSpPr>
-      <p:grpSpPr>
-        <a:xfrm>
-          <a:off x="0" y="0"/>
-          <a:ext cx="0" cy="0"/>
-          <a:chOff x="0" y="0"/>
-          <a:chExt cx="0" cy="0"/>
-        </a:xfrm>
-      </p:grpSpPr>
+      <p:grpSpPr/>
+      <p:sp>
+        <p:nvSpPr>
+          <p:cNvPr id="11" name="TextBox 10"/>
+          <p:cNvSpPr txBox="1"/>
+          <p:nvPr/>
+        </p:nvSpPr>
+        <p:spPr>
+          <a:xfrm>
+            <a:off x="520861" y="170082"/>
+            <a:ext cx="11979797" cy="1477328"/>
+          </a:xfrm>
+          <a:prstGeom prst="rect">
+            <a:avLst/>
+          </a:prstGeom>
+          <a:noFill/>
+        </p:spPr>
+        <p:txBody>
+          <a:bodyPr wrap="square" rtlCol="0">
+            <a:spAutoFit/>
+          </a:bodyPr>
+          <a:lstStyle/>
+          <a:p>
+            <a:r>
+              <a:rPr lang="en-US" sz="9000" dirty="0">
+                <a:latin typeface="Aliens &amp; cows" panose="00000500000000000000" pitchFamily="2" charset="0"/>
+              </a:rPr>
+              <a:t>Pulling it all together</a:t>
+            </a:r>
+          </a:p>
+        </p:txBody>
+      </p:sp>
+      <p:sp>
+        <p:nvSpPr>
+          <p:cNvPr id="3" name="TextBox 2"/>
+          <p:cNvSpPr txBox="1"/>
+          <p:nvPr/>
+        </p:nvSpPr>
+        <p:spPr>
+          <a:xfrm>
+            <a:off x="685800" y="2628900"/>
+            <a:ext cx="16230600" cy="6740307"/>
+          </a:xfrm>
+          <a:prstGeom prst="rect">
+            <a:avLst/>
+          </a:prstGeom>
+          <a:noFill/>
+        </p:spPr>
+        <p:txBody>
+          <a:bodyPr wrap="square" rtlCol="0">
+            <a:spAutoFit/>
+          </a:bodyPr>
+          <a:lstStyle/>
+          <a:p>
+            <a:pPr marL="685800" indent="-685800">
+              <a:buClr>
+                <a:srgbClr val="CF3338"/>
+              </a:buClr>
+              <a:buFont typeface="Arial" panose="020B0604020202020204" pitchFamily="34" charset="0"/>
+              <a:buChar char="•"/>
+            </a:pPr>
+            <a:r>
+              <a:rPr lang="en-US" sz="4800" dirty="0">
+                <a:solidFill>
+                  <a:srgbClr val="707070"/>
+                </a:solidFill>
+                <a:latin typeface="Pragmatica" panose="020B0403040502020204" pitchFamily="34" charset="0"/>
+              </a:rPr>
+              <a:t>Power Platform extends Excel into automation, dashboards, apps, and AI — start with the tool that solves your biggest pain point</a:t>
+            </a:r>
+          </a:p>
+          <a:p>
+            <a:pPr marL="685800" indent="-685800">
+              <a:buClr>
+                <a:srgbClr val="CF3338"/>
+              </a:buClr>
+              <a:buFont typeface="Arial" panose="020B0604020202020204" pitchFamily="34" charset="0"/>
+              <a:buChar char="•"/>
+            </a:pPr>
+            <a:r>
+              <a:rPr lang="en-US" sz="4800" dirty="0">
+                <a:solidFill>
+                  <a:srgbClr val="707070"/>
+                </a:solidFill>
+                <a:latin typeface="Pragmatica" panose="020B0403040502020204" pitchFamily="34" charset="0"/>
+              </a:rPr>
+              <a:t>Combine components for end-to-end workflows: collect data in Power Apps, automate with Power Automate, visualize in Power BI</a:t>
+            </a:r>
+          </a:p>
+          <a:p>
+            <a:pPr marL="685800" indent="-685800">
+              <a:buClr>
+                <a:srgbClr val="CF3338"/>
+              </a:buClr>
+              <a:buFont typeface="Arial" panose="020B0604020202020204" pitchFamily="34" charset="0"/>
+              <a:buChar char="•"/>
+            </a:pPr>
+            <a:r>
+              <a:rPr lang="en-US" sz="4800" dirty="0">
+                <a:solidFill>
+                  <a:srgbClr val="707070"/>
+                </a:solidFill>
+                <a:latin typeface="Pragmatica" panose="020B0403040502020204" pitchFamily="34" charset="0"/>
+              </a:rPr>
+              <a:t>Use governance and sharing best practices when deploying flows, apps, and reports across your organization</a:t>
+            </a:r>
+          </a:p>
+          <a:p>
+            <a:pPr marL="685800" indent="-685800">
+              <a:buClr>
+                <a:srgbClr val="CF3338"/>
+              </a:buClr>
+              <a:buFont typeface="Arial" panose="020B0604020202020204" pitchFamily="34" charset="0"/>
+              <a:buChar char="•"/>
+            </a:pPr>
+            <a:r>
+              <a:rPr lang="en-US" sz="4800" dirty="0">
+                <a:solidFill>
+                  <a:srgbClr val="707070"/>
+                </a:solidFill>
+                <a:latin typeface="Pragmatica" panose="020B0403040502020204" pitchFamily="34" charset="0"/>
+              </a:rPr>
+              <a:t>Keep experimenting with free trials and Copilot to grow into a Power Platform champion in your organization</a:t>
+            </a:r>
+            <a:r>
+              <a:rPr lang="en-US" sz="4800" dirty="0" err="1">
+                <a:solidFill>
+                  <a:srgbClr val="707070"/>
+                </a:solidFill>
+                <a:latin typeface="Pragmatica" panose="020B0403040502020204" pitchFamily="34" charset="0"/>
+              </a:rPr>
+              <a:t/>
+            </a:r>
+            <a:r>
+              <a:rPr lang="en-US" sz="4800" dirty="0">
+                <a:solidFill>
+                  <a:srgbClr val="707070"/>
+                </a:solidFill>
+                <a:latin typeface="Pragmatica" panose="020B0403040502020204" pitchFamily="34" charset="0"/>
+              </a:rPr>
+              <a:t/>
+            </a:r>
+          </a:p>
+        </p:txBody>
+      </p:sp>
       <p:pic>
         <p:nvPicPr>
-          <p:cNvPr id="10" name="Picture 9">
+          <p:cNvPr id="15" name="Picture 14" descr="A close up of a sign&#10;&#10;Description automatically generated">
             <a:extLst>
               <a:ext uri="{FF2B5EF4-FFF2-40B4-BE49-F238E27FC236}">
-                <a16:creationId xmlns:a16="http://schemas.microsoft.com/office/drawing/2014/main" id="{56CBD8B9-A494-A7F7-0F64-845B951EC99F}"/>
+                <a16:creationId xmlns:a16="http://schemas.microsoft.com/office/drawing/2014/main" id="{29761B90-A7DE-4A60-A915-F085BD87CAB4}"/>
               </a:ext>
             </a:extLst>
           </p:cNvPr>
@@ -14115,146 +14435,21 @@
               </a:ext>
             </a:extLst>
           </a:blip>
-          <a:srcRect/>
-          <a:stretch/>
+          <a:stretch>
+            <a:fillRect/>
+          </a:stretch>
         </p:blipFill>
         <p:spPr>
           <a:xfrm>
-            <a:off x="13542796" y="4850092"/>
-            <a:ext cx="4745204" cy="5435819"/>
+            <a:off x="16341036" y="8058429"/>
+            <a:ext cx="1942857" cy="2228571"/>
           </a:xfrm>
           <a:prstGeom prst="rect">
             <a:avLst/>
           </a:prstGeom>
         </p:spPr>
       </p:pic>
-      <p:pic>
-        <p:nvPicPr>
-          <p:cNvPr id="4" name="Picture 3">
-            <a:extLst>
-              <a:ext uri="{FF2B5EF4-FFF2-40B4-BE49-F238E27FC236}">
-                <a16:creationId xmlns:a16="http://schemas.microsoft.com/office/drawing/2014/main" id="{AC63943A-3FAF-22B6-228E-4092BA65ACAF}"/>
-              </a:ext>
-            </a:extLst>
-          </p:cNvPr>
-          <p:cNvPicPr>
-            <a:picLocks noChangeAspect="1"/>
-          </p:cNvPicPr>
-          <p:nvPr/>
-        </p:nvPicPr>
-        <p:blipFill>
-          <a:blip r:embed="rId3">
-            <a:extLst>
-              <a:ext uri="{28A0092B-C50C-407E-A947-70E740481C1C}">
-                <a14:useLocalDpi xmlns:a14="http://schemas.microsoft.com/office/drawing/2010/main" val="0"/>
-              </a:ext>
-            </a:extLst>
-          </a:blip>
-          <a:stretch>
-            <a:fillRect/>
-          </a:stretch>
-        </p:blipFill>
-        <p:spPr>
-          <a:xfrm>
-            <a:off x="-914400" y="-3440159"/>
-            <a:ext cx="15257208" cy="11189825"/>
-          </a:xfrm>
-          <a:prstGeom prst="rect">
-            <a:avLst/>
-          </a:prstGeom>
-        </p:spPr>
-      </p:pic>
-      <p:sp>
-        <p:nvSpPr>
-          <p:cNvPr id="11" name="TextBox 10">
-            <a:extLst>
-              <a:ext uri="{FF2B5EF4-FFF2-40B4-BE49-F238E27FC236}">
-                <a16:creationId xmlns:a16="http://schemas.microsoft.com/office/drawing/2014/main" id="{5DFCEBB5-9C7D-6182-700C-0428AD2DDE67}"/>
-              </a:ext>
-            </a:extLst>
-          </p:cNvPr>
-          <p:cNvSpPr txBox="1"/>
-          <p:nvPr/>
-        </p:nvSpPr>
-        <p:spPr>
-          <a:xfrm>
-            <a:off x="486137" y="2531318"/>
-            <a:ext cx="11979797" cy="923330"/>
-          </a:xfrm>
-          <a:prstGeom prst="rect">
-            <a:avLst/>
-          </a:prstGeom>
-          <a:noFill/>
-        </p:spPr>
-        <p:txBody>
-          <a:bodyPr wrap="square" rtlCol="0">
-            <a:spAutoFit/>
-          </a:bodyPr>
-          <a:lstStyle/>
-          <a:p>
-            <a:r>
-              <a:rPr lang="en-US" sz="5400" b="1" dirty="0">
-                <a:solidFill>
-                  <a:srgbClr val="CF3338"/>
-                </a:solidFill>
-                <a:latin typeface="Pragmatica" panose="020B0403040502020204" pitchFamily="34" charset="0"/>
-              </a:rPr>
-              <a:t>THANK YOU</a:t>
-            </a:r>
-          </a:p>
-        </p:txBody>
-      </p:sp>
-      <p:sp>
-        <p:nvSpPr>
-          <p:cNvPr id="2" name="AutoShape 2" descr="Home | Full Stack Modeller">
-            <a:extLst>
-              <a:ext uri="{FF2B5EF4-FFF2-40B4-BE49-F238E27FC236}">
-                <a16:creationId xmlns:a16="http://schemas.microsoft.com/office/drawing/2014/main" id="{16E5F1F1-B220-BEC5-B5EA-499D4942916C}"/>
-              </a:ext>
-            </a:extLst>
-          </p:cNvPr>
-          <p:cNvSpPr>
-            <a:spLocks noChangeAspect="1" noChangeArrowheads="1"/>
-          </p:cNvSpPr>
-          <p:nvPr/>
-        </p:nvSpPr>
-        <p:spPr bwMode="auto">
-          <a:xfrm>
-            <a:off x="8991600" y="4991100"/>
-            <a:ext cx="304800" cy="304800"/>
-          </a:xfrm>
-          <a:prstGeom prst="rect">
-            <a:avLst/>
-          </a:prstGeom>
-          <a:noFill/>
-          <a:extLst>
-            <a:ext uri="{909E8E84-426E-40DD-AFC4-6F175D3DCCD1}">
-              <a14:hiddenFill xmlns:a14="http://schemas.microsoft.com/office/drawing/2010/main">
-                <a:solidFill>
-                  <a:srgbClr val="FFFFFF"/>
-                </a:solidFill>
-              </a14:hiddenFill>
-            </a:ext>
-          </a:extLst>
-        </p:spPr>
-        <p:txBody>
-          <a:bodyPr vert="horz" wrap="square" lIns="91440" tIns="45720" rIns="91440" bIns="45720" numCol="1" anchor="t" anchorCtr="0" compatLnSpc="1">
-            <a:prstTxWarp prst="textNoShape">
-              <a:avLst/>
-            </a:prstTxWarp>
-          </a:bodyPr>
-          <a:lstStyle/>
-          <a:p>
-            <a:endParaRPr lang="en-US"/>
-          </a:p>
-        </p:txBody>
-      </p:sp>
     </p:spTree>
-    <p:extLst>
-      <p:ext uri="{BB962C8B-B14F-4D97-AF65-F5344CB8AC3E}">
-        <p14:creationId xmlns:p14="http://schemas.microsoft.com/office/powerpoint/2010/main" val="709344641"/>
-      </p:ext>
-    </p:extLst>
   </p:cSld>
   <p:clrMapOvr>
     <a:masterClrMapping/>
@@ -14431,6 +14626,198 @@
     <p:extLst>
       <p:ext uri="{BB962C8B-B14F-4D97-AF65-F5344CB8AC3E}">
         <p14:creationId xmlns:p14="http://schemas.microsoft.com/office/powerpoint/2010/main" val="3740785016"/>
+      </p:ext>
+    </p:extLst>
+  </p:cSld>
+  <p:clrMapOvr>
+    <a:masterClrMapping/>
+  </p:clrMapOvr>
+</p:sld>
+</file>
+
+<file path=ppt/slides/slide40.xml><?xml version="1.0" encoding="utf-8"?>
+<p:sld xmlns:a="http://schemas.openxmlformats.org/drawingml/2006/main" xmlns:r="http://schemas.openxmlformats.org/officeDocument/2006/relationships" xmlns:p="http://schemas.openxmlformats.org/presentationml/2006/main">
+  <p:cSld>
+    <p:spTree>
+      <p:nvGrpSpPr>
+        <p:cNvPr id="1" name="">
+          <a:extLst>
+            <a:ext uri="{FF2B5EF4-FFF2-40B4-BE49-F238E27FC236}">
+              <a16:creationId xmlns:a16="http://schemas.microsoft.com/office/drawing/2014/main" id="{2501CF9C-FC7D-DEAE-2D87-10577021DCAD}"/>
+            </a:ext>
+          </a:extLst>
+        </p:cNvPr>
+        <p:cNvGrpSpPr/>
+        <p:nvPr/>
+      </p:nvGrpSpPr>
+      <p:grpSpPr>
+        <a:xfrm>
+          <a:off x="0" y="0"/>
+          <a:ext cx="0" cy="0"/>
+          <a:chOff x="0" y="0"/>
+          <a:chExt cx="0" cy="0"/>
+        </a:xfrm>
+      </p:grpSpPr>
+      <p:pic>
+        <p:nvPicPr>
+          <p:cNvPr id="10" name="Picture 9">
+            <a:extLst>
+              <a:ext uri="{FF2B5EF4-FFF2-40B4-BE49-F238E27FC236}">
+                <a16:creationId xmlns:a16="http://schemas.microsoft.com/office/drawing/2014/main" id="{56CBD8B9-A494-A7F7-0F64-845B951EC99F}"/>
+              </a:ext>
+            </a:extLst>
+          </p:cNvPr>
+          <p:cNvPicPr>
+            <a:picLocks noChangeAspect="1"/>
+          </p:cNvPicPr>
+          <p:nvPr/>
+        </p:nvPicPr>
+        <p:blipFill>
+          <a:blip r:embed="rId2">
+            <a:extLst>
+              <a:ext uri="{28A0092B-C50C-407E-A947-70E740481C1C}">
+                <a14:useLocalDpi xmlns:a14="http://schemas.microsoft.com/office/drawing/2010/main" val="0"/>
+              </a:ext>
+            </a:extLst>
+          </a:blip>
+          <a:srcRect/>
+          <a:stretch/>
+        </p:blipFill>
+        <p:spPr>
+          <a:xfrm>
+            <a:off x="13542796" y="4850092"/>
+            <a:ext cx="4745204" cy="5435819"/>
+          </a:xfrm>
+          <a:prstGeom prst="rect">
+            <a:avLst/>
+          </a:prstGeom>
+        </p:spPr>
+      </p:pic>
+      <p:pic>
+        <p:nvPicPr>
+          <p:cNvPr id="4" name="Picture 3">
+            <a:extLst>
+              <a:ext uri="{FF2B5EF4-FFF2-40B4-BE49-F238E27FC236}">
+                <a16:creationId xmlns:a16="http://schemas.microsoft.com/office/drawing/2014/main" id="{AC63943A-3FAF-22B6-228E-4092BA65ACAF}"/>
+              </a:ext>
+            </a:extLst>
+          </p:cNvPr>
+          <p:cNvPicPr>
+            <a:picLocks noChangeAspect="1"/>
+          </p:cNvPicPr>
+          <p:nvPr/>
+        </p:nvPicPr>
+        <p:blipFill>
+          <a:blip r:embed="rId3">
+            <a:extLst>
+              <a:ext uri="{28A0092B-C50C-407E-A947-70E740481C1C}">
+                <a14:useLocalDpi xmlns:a14="http://schemas.microsoft.com/office/drawing/2010/main" val="0"/>
+              </a:ext>
+            </a:extLst>
+          </a:blip>
+          <a:stretch>
+            <a:fillRect/>
+          </a:stretch>
+        </p:blipFill>
+        <p:spPr>
+          <a:xfrm>
+            <a:off x="-914400" y="-3440159"/>
+            <a:ext cx="15257208" cy="11189825"/>
+          </a:xfrm>
+          <a:prstGeom prst="rect">
+            <a:avLst/>
+          </a:prstGeom>
+        </p:spPr>
+      </p:pic>
+      <p:sp>
+        <p:nvSpPr>
+          <p:cNvPr id="11" name="TextBox 10">
+            <a:extLst>
+              <a:ext uri="{FF2B5EF4-FFF2-40B4-BE49-F238E27FC236}">
+                <a16:creationId xmlns:a16="http://schemas.microsoft.com/office/drawing/2014/main" id="{5DFCEBB5-9C7D-6182-700C-0428AD2DDE67}"/>
+              </a:ext>
+            </a:extLst>
+          </p:cNvPr>
+          <p:cNvSpPr txBox="1"/>
+          <p:nvPr/>
+        </p:nvSpPr>
+        <p:spPr>
+          <a:xfrm>
+            <a:off x="486137" y="2531318"/>
+            <a:ext cx="11979797" cy="923330"/>
+          </a:xfrm>
+          <a:prstGeom prst="rect">
+            <a:avLst/>
+          </a:prstGeom>
+          <a:noFill/>
+        </p:spPr>
+        <p:txBody>
+          <a:bodyPr wrap="square" rtlCol="0">
+            <a:spAutoFit/>
+          </a:bodyPr>
+          <a:lstStyle/>
+          <a:p>
+            <a:r>
+              <a:rPr lang="en-US" sz="5400" b="1" dirty="0">
+                <a:solidFill>
+                  <a:srgbClr val="CF3338"/>
+                </a:solidFill>
+                <a:latin typeface="Pragmatica" panose="020B0403040502020204" pitchFamily="34" charset="0"/>
+              </a:rPr>
+              <a:t>THANK YOU</a:t>
+            </a:r>
+          </a:p>
+        </p:txBody>
+      </p:sp>
+      <p:sp>
+        <p:nvSpPr>
+          <p:cNvPr id="2" name="AutoShape 2" descr="Home | Full Stack Modeller">
+            <a:extLst>
+              <a:ext uri="{FF2B5EF4-FFF2-40B4-BE49-F238E27FC236}">
+                <a16:creationId xmlns:a16="http://schemas.microsoft.com/office/drawing/2014/main" id="{16E5F1F1-B220-BEC5-B5EA-499D4942916C}"/>
+              </a:ext>
+            </a:extLst>
+          </p:cNvPr>
+          <p:cNvSpPr>
+            <a:spLocks noChangeAspect="1" noChangeArrowheads="1"/>
+          </p:cNvSpPr>
+          <p:nvPr/>
+        </p:nvSpPr>
+        <p:spPr bwMode="auto">
+          <a:xfrm>
+            <a:off x="8991600" y="4991100"/>
+            <a:ext cx="304800" cy="304800"/>
+          </a:xfrm>
+          <a:prstGeom prst="rect">
+            <a:avLst/>
+          </a:prstGeom>
+          <a:noFill/>
+          <a:extLst>
+            <a:ext uri="{909E8E84-426E-40DD-AFC4-6F175D3DCCD1}">
+              <a14:hiddenFill xmlns:a14="http://schemas.microsoft.com/office/drawing/2010/main">
+                <a:solidFill>
+                  <a:srgbClr val="FFFFFF"/>
+                </a:solidFill>
+              </a14:hiddenFill>
+            </a:ext>
+          </a:extLst>
+        </p:spPr>
+        <p:txBody>
+          <a:bodyPr vert="horz" wrap="square" lIns="91440" tIns="45720" rIns="91440" bIns="45720" numCol="1" anchor="t" anchorCtr="0" compatLnSpc="1">
+            <a:prstTxWarp prst="textNoShape">
+              <a:avLst/>
+            </a:prstTxWarp>
+          </a:bodyPr>
+          <a:lstStyle/>
+          <a:p>
+            <a:endParaRPr lang="en-US"/>
+          </a:p>
+        </p:txBody>
+      </p:sp>
+    </p:spTree>
+    <p:extLst>
+      <p:ext uri="{BB962C8B-B14F-4D97-AF65-F5344CB8AC3E}">
+        <p14:creationId xmlns:p14="http://schemas.microsoft.com/office/powerpoint/2010/main" val="709344641"/>
       </p:ext>
     </p:extLst>
   </p:cSld>
